--- a/docs/Takumi_Round1_JETRO-PS-03.pptx
+++ b/docs/Takumi_Round1_JETRO-PS-03.pptx
@@ -4159,7 +4159,7 @@
                 <a:ea typeface="Segoe UI" pitchFamily="34" charset="-122"/>
                 <a:cs typeface="Segoe UI" pitchFamily="34" charset="-120"/>
               </a:rPr>
-              <a:t>≤5-min demo video; stays on-device</a:t>
+              <a:t>≤10-min demo video; stays on-device</a:t>
             </a:r>
             <a:endParaRPr lang="en-US" sz="1050" dirty="0"/>
           </a:p>
